--- a/carpentry/intake-142/PowerPoint/Day-02_2026-10-30_Week-1.pptx
+++ b/carpentry/intake-142/PowerPoint/Day-02_2026-10-30_Week-1.pptx
@@ -5605,7 +5605,7 @@
                 </a:solidFill>
                 <a:latin typeface="Arial"/>
               </a:rPr>
-              <a:t>Textbook Chapter 1 pp.15–21</a:t>
+              <a:t>Textbook Chapter 1 pp.17–23</a:t>
             </a:r>
           </a:p>
         </p:txBody>
@@ -6363,7 +6363,7 @@
                 </a:solidFill>
                 <a:latin typeface="Arial"/>
               </a:rPr>
-              <a:t>Textbook Chapter 1 pp.15–21</a:t>
+              <a:t>Textbook Chapter 1 pp.17–23</a:t>
             </a:r>
           </a:p>
         </p:txBody>
@@ -7177,7 +7177,7 @@
                 </a:solidFill>
                 <a:latin typeface="Arial"/>
               </a:rPr>
-              <a:t>Textbook Chapter 1 pp.15–21</a:t>
+              <a:t>Textbook Chapter 1 pp.17–23</a:t>
             </a:r>
           </a:p>
         </p:txBody>
@@ -7933,7 +7933,7 @@
                 </a:solidFill>
                 <a:latin typeface="Arial"/>
               </a:rPr>
-              <a:t>Textbook Chapter 1 pp.15–21</a:t>
+              <a:t>Textbook Chapter 1 pp.17–23</a:t>
             </a:r>
           </a:p>
         </p:txBody>
@@ -8716,7 +8716,7 @@
                 </a:solidFill>
                 <a:latin typeface="Arial"/>
               </a:rPr>
-              <a:t>Textbook Chapter 1 pp.15–21</a:t>
+              <a:t>Textbook Chapter 1 pp.17–23</a:t>
             </a:r>
           </a:p>
         </p:txBody>
@@ -9530,7 +9530,7 @@
                 </a:solidFill>
                 <a:latin typeface="Arial"/>
               </a:rPr>
-              <a:t>Textbook Chapter 1 pp.15–21</a:t>
+              <a:t>Textbook Chapter 1 pp.17–23</a:t>
             </a:r>
           </a:p>
         </p:txBody>
@@ -10306,7 +10306,7 @@
                 </a:solidFill>
                 <a:latin typeface="Arial"/>
               </a:rPr>
-              <a:t>Textbook Chapter 1 pp.15–21</a:t>
+              <a:t>Textbook Chapter 1 pp.17–23</a:t>
             </a:r>
           </a:p>
         </p:txBody>
@@ -11265,7 +11265,7 @@
                 </a:solidFill>
                 <a:latin typeface="Arial"/>
               </a:rPr>
-              <a:t>Textbook Chapter 1 pp.15–21</a:t>
+              <a:t>Textbook Chapter 1 pp.17–23</a:t>
             </a:r>
           </a:p>
         </p:txBody>
@@ -11976,7 +11976,7 @@
                 </a:solidFill>
                 <a:latin typeface="Arial"/>
               </a:rPr>
-              <a:t>Textbook Chapter 1 pp.15–21</a:t>
+              <a:t>Textbook Chapter 1 pp.17–23</a:t>
             </a:r>
           </a:p>
         </p:txBody>
@@ -12687,7 +12687,7 @@
                 </a:solidFill>
                 <a:latin typeface="Arial"/>
               </a:rPr>
-              <a:t>Textbook Chapter 1 pp.15–21</a:t>
+              <a:t>Textbook Chapter 1 pp.17–23</a:t>
             </a:r>
           </a:p>
         </p:txBody>
@@ -16853,7 +16853,7 @@
                 </a:solidFill>
                 <a:latin typeface="Arial"/>
               </a:rPr>
-              <a:t>Textbook Chapter 1 pp.15–21</a:t>
+              <a:t>Textbook Chapter 1 pp.17–23</a:t>
             </a:r>
           </a:p>
         </p:txBody>
@@ -17564,7 +17564,7 @@
                 </a:solidFill>
                 <a:latin typeface="Arial"/>
               </a:rPr>
-              <a:t>Textbook Chapter 1 pp.15–21</a:t>
+              <a:t>Textbook Chapter 1 pp.17–23</a:t>
             </a:r>
           </a:p>
         </p:txBody>
@@ -18275,7 +18275,7 @@
                 </a:solidFill>
                 <a:latin typeface="Arial"/>
               </a:rPr>
-              <a:t>Textbook Chapter 1 pp.15–21</a:t>
+              <a:t>Textbook Chapter 1 pp.17–23</a:t>
             </a:r>
           </a:p>
         </p:txBody>
@@ -19754,7 +19754,7 @@
                 </a:solidFill>
                 <a:latin typeface="Arial"/>
               </a:rPr>
-              <a:t>Textbook sections 1.4–1.8 pp.12–21; sections 2.11 p.39</a:t>
+              <a:t>Textbook sections 1.4–1.8 pp.14–23; sections 2.11 p.59</a:t>
             </a:r>
           </a:p>
         </p:txBody>
@@ -19954,7 +19954,7 @@
                 </a:solidFill>
                 <a:latin typeface="Arial"/>
               </a:rPr>
-              <a:t>Textbook sections 1.4–1.8 pp.12–21; sections 2.11 p.39</a:t>
+              <a:t>Textbook sections 1.4–1.8 pp.14–23; sections 2.11 p.59</a:t>
             </a:r>
           </a:p>
         </p:txBody>
@@ -20664,7 +20664,7 @@
                 </a:solidFill>
                 <a:latin typeface="Arial"/>
               </a:rPr>
-              <a:t>Textbook sections 1.4–1.8 pp.12–21; sections 2.11 p.39</a:t>
+              <a:t>Textbook sections 1.4–1.8 pp.14–23; sections 2.11 p.59</a:t>
             </a:r>
           </a:p>
         </p:txBody>
@@ -21478,7 +21478,7 @@
                 </a:solidFill>
                 <a:latin typeface="Arial"/>
               </a:rPr>
-              <a:t>Textbook sections 1.4–1.8 pp.12–21; sections 2.11 p.39</a:t>
+              <a:t>Textbook sections 1.4–1.8 pp.14–23; sections 2.11 p.59</a:t>
             </a:r>
           </a:p>
         </p:txBody>
@@ -22324,7 +22324,7 @@
                 </a:solidFill>
                 <a:latin typeface="Arial"/>
               </a:rPr>
-              <a:t>Textbook sections 1.4–1.8 pp.12–21; sections 2.11 p.39</a:t>
+              <a:t>Textbook sections 1.4–1.8 pp.14–23; sections 2.11 p.59</a:t>
             </a:r>
           </a:p>
         </p:txBody>
@@ -23569,7 +23569,7 @@
                 </a:solidFill>
                 <a:latin typeface="Arial"/>
               </a:rPr>
-              <a:t>Textbook sections 1.4–1.8 pp.12–21; sections 2.11 p.39</a:t>
+              <a:t>Textbook sections 1.4–1.8 pp.14–23; sections 2.11 p.59</a:t>
             </a:r>
           </a:p>
         </p:txBody>
@@ -25495,7 +25495,7 @@
                 </a:solidFill>
                 <a:latin typeface="Arial"/>
               </a:rPr>
-              <a:t>Textbook Chapter 1 pp.15–21</a:t>
+              <a:t>Textbook Chapter 1 pp.17–23</a:t>
             </a:r>
           </a:p>
         </p:txBody>
@@ -25695,7 +25695,7 @@
                 </a:solidFill>
                 <a:latin typeface="Arial"/>
               </a:rPr>
-              <a:t>Textbook Chapter 1 pp.15–21</a:t>
+              <a:t>Textbook Chapter 1 pp.17–23</a:t>
             </a:r>
           </a:p>
         </p:txBody>
@@ -26357,7 +26357,7 @@
                 </a:solidFill>
                 <a:latin typeface="Arial"/>
               </a:rPr>
-              <a:t>Textbook  |  page 14</a:t>
+              <a:t>Textbook  |  page 16</a:t>
             </a:r>
           </a:p>
         </p:txBody>
@@ -26405,7 +26405,7 @@
                 </a:solidFill>
                 <a:latin typeface="Arial"/>
               </a:rPr>
-              <a:t>Textbook sections 1.4–1.8 pp.12–21; sections 2.11 p.39</a:t>
+              <a:t>Textbook sections 1.4–1.8 pp.14–23; sections 2.11 p.59</a:t>
             </a:r>
           </a:p>
         </p:txBody>
@@ -26477,7 +26477,7 @@
                 </a:solidFill>
                 <a:latin typeface="Arial"/>
               </a:rPr>
-              <a:t>Textbook p.14 · Example 1.6: used length and offcut account for the original stock.</a:t>
+              <a:t>Textbook p.16 · Example 1.6: used length and offcut account for the original stock.</a:t>
             </a:r>
           </a:p>
         </p:txBody>
@@ -27043,7 +27043,7 @@
                 </a:solidFill>
                 <a:latin typeface="Arial"/>
               </a:rPr>
-              <a:t>Textbook  |  page 14</a:t>
+              <a:t>Textbook  |  page 16</a:t>
             </a:r>
           </a:p>
         </p:txBody>
@@ -27091,7 +27091,7 @@
                 </a:solidFill>
                 <a:latin typeface="Arial"/>
               </a:rPr>
-              <a:t>Textbook sections 1.4–1.8 pp.12–21; sections 2.11 p.39</a:t>
+              <a:t>Textbook sections 1.4–1.8 pp.14–23; sections 2.11 p.59</a:t>
             </a:r>
           </a:p>
         </p:txBody>
@@ -27163,7 +27163,7 @@
                 </a:solidFill>
                 <a:latin typeface="Arial"/>
               </a:rPr>
-              <a:t>Textbook p.14 · Example 1.7: known parts and a hidden dimension.</a:t>
+              <a:t>Textbook p.16 · Example 1.7: known parts and a hidden dimension.</a:t>
             </a:r>
           </a:p>
         </p:txBody>
@@ -27777,7 +27777,7 @@
                 </a:solidFill>
                 <a:latin typeface="Arial"/>
               </a:rPr>
-              <a:t>Textbook sections 1.4–1.8 pp.12–21; sections 2.11 p.39</a:t>
+              <a:t>Textbook sections 1.4–1.8 pp.14–23; sections 2.11 p.59</a:t>
             </a:r>
           </a:p>
         </p:txBody>
@@ -28535,7 +28535,7 @@
                 </a:solidFill>
                 <a:latin typeface="Arial"/>
               </a:rPr>
-              <a:t>Textbook sections 1.4–1.8 pp.12–21; sections 2.11 p.39</a:t>
+              <a:t>Textbook sections 1.4–1.8 pp.14–23; sections 2.11 p.59</a:t>
             </a:r>
           </a:p>
         </p:txBody>
@@ -29349,7 +29349,7 @@
                 </a:solidFill>
                 <a:latin typeface="Arial"/>
               </a:rPr>
-              <a:t>Textbook sections 1.4–1.8 pp.12–21; sections 2.11 p.39</a:t>
+              <a:t>Textbook sections 1.4–1.8 pp.14–23; sections 2.11 p.59</a:t>
             </a:r>
           </a:p>
         </p:txBody>
@@ -30105,7 +30105,7 @@
                 </a:solidFill>
                 <a:latin typeface="Arial"/>
               </a:rPr>
-              <a:t>Textbook sections 1.4–1.8 pp.12–21; sections 2.11 p.39</a:t>
+              <a:t>Textbook sections 1.4–1.8 pp.14–23; sections 2.11 p.59</a:t>
             </a:r>
           </a:p>
         </p:txBody>
@@ -30888,7 +30888,7 @@
                 </a:solidFill>
                 <a:latin typeface="Arial"/>
               </a:rPr>
-              <a:t>Textbook sections 1.4–1.8 pp.12–21; sections 2.11 p.39</a:t>
+              <a:t>Textbook sections 1.4–1.8 pp.14–23; sections 2.11 p.59</a:t>
             </a:r>
           </a:p>
         </p:txBody>
@@ -31702,7 +31702,7 @@
                 </a:solidFill>
                 <a:latin typeface="Arial"/>
               </a:rPr>
-              <a:t>Textbook sections 1.4–1.8 pp.12–21; sections 2.11 p.39</a:t>
+              <a:t>Textbook sections 1.4–1.8 pp.14–23; sections 2.11 p.59</a:t>
             </a:r>
           </a:p>
         </p:txBody>
@@ -32478,7 +32478,7 @@
                 </a:solidFill>
                 <a:latin typeface="Arial"/>
               </a:rPr>
-              <a:t>Textbook sections 1.4–1.8 pp.12–21; sections 2.11 p.39</a:t>
+              <a:t>Textbook sections 1.4–1.8 pp.14–23; sections 2.11 p.59</a:t>
             </a:r>
           </a:p>
         </p:txBody>
@@ -33437,7 +33437,7 @@
                 </a:solidFill>
                 <a:latin typeface="Arial"/>
               </a:rPr>
-              <a:t>Textbook sections 1.4–1.8 pp.12–21; sections 2.11 p.39</a:t>
+              <a:t>Textbook sections 1.4–1.8 pp.14–23; sections 2.11 p.59</a:t>
             </a:r>
           </a:p>
         </p:txBody>
@@ -34148,7 +34148,7 @@
                 </a:solidFill>
                 <a:latin typeface="Arial"/>
               </a:rPr>
-              <a:t>Textbook Chapter 1 pp.15–21</a:t>
+              <a:t>Textbook Chapter 1 pp.17–23</a:t>
             </a:r>
           </a:p>
         </p:txBody>
@@ -34962,7 +34962,7 @@
                 </a:solidFill>
                 <a:latin typeface="Arial"/>
               </a:rPr>
-              <a:t>Textbook sections 1.4–1.8 pp.12–21; sections 2.11 p.39</a:t>
+              <a:t>Textbook sections 1.4–1.8 pp.14–23; sections 2.11 p.59</a:t>
             </a:r>
           </a:p>
         </p:txBody>
@@ -35648,7 +35648,7 @@
                 </a:solidFill>
                 <a:latin typeface="Arial"/>
               </a:rPr>
-              <a:t>Textbook sections 1.4–1.8 pp.12–21; sections 2.11 p.39</a:t>
+              <a:t>Textbook sections 1.4–1.8 pp.14–23; sections 2.11 p.59</a:t>
             </a:r>
           </a:p>
         </p:txBody>
@@ -36462,7 +36462,7 @@
                 </a:solidFill>
                 <a:latin typeface="Arial"/>
               </a:rPr>
-              <a:t>Textbook sections 1.4–1.8 pp.12–21; sections 2.11 p.39</a:t>
+              <a:t>Textbook sections 1.4–1.8 pp.14–23; sections 2.11 p.59</a:t>
             </a:r>
           </a:p>
         </p:txBody>
@@ -37173,7 +37173,7 @@
                 </a:solidFill>
                 <a:latin typeface="Arial"/>
               </a:rPr>
-              <a:t>Textbook sections 1.4–1.8 pp.12–21; sections 2.11 p.39</a:t>
+              <a:t>Textbook sections 1.4–1.8 pp.14–23; sections 2.11 p.59</a:t>
             </a:r>
           </a:p>
         </p:txBody>
@@ -37884,7 +37884,7 @@
                 </a:solidFill>
                 <a:latin typeface="Arial"/>
               </a:rPr>
-              <a:t>Textbook sections 1.4–1.8 pp.12–21; sections 2.11 p.39</a:t>
+              <a:t>Textbook sections 1.4–1.8 pp.14–23; sections 2.11 p.59</a:t>
             </a:r>
           </a:p>
         </p:txBody>
@@ -38833,7 +38833,7 @@
                 </a:solidFill>
                 <a:latin typeface="Arial"/>
               </a:rPr>
-              <a:t>Textbook Chapter 1 pp.15–21</a:t>
+              <a:t>Textbook Chapter 1 pp.17–23</a:t>
             </a:r>
           </a:p>
         </p:txBody>
@@ -40078,7 +40078,7 @@
                 </a:solidFill>
                 <a:latin typeface="Arial"/>
               </a:rPr>
-              <a:t>Textbook Chapter 1 pp.15–21</a:t>
+              <a:t>Textbook Chapter 1 pp.17–23</a:t>
             </a:r>
           </a:p>
         </p:txBody>
@@ -42094,7 +42094,7 @@
                 </a:solidFill>
                 <a:latin typeface="Arial"/>
               </a:rPr>
-              <a:t>Textbook  |  page 20</a:t>
+              <a:t>Textbook  |  page 22</a:t>
             </a:r>
           </a:p>
         </p:txBody>
@@ -42142,7 +42142,7 @@
                 </a:solidFill>
                 <a:latin typeface="Arial"/>
               </a:rPr>
-              <a:t>Textbook Chapter 1 pp.15–21</a:t>
+              <a:t>Textbook Chapter 1 pp.17–23</a:t>
             </a:r>
           </a:p>
         </p:txBody>
@@ -42214,7 +42214,7 @@
                 </a:solidFill>
                 <a:latin typeface="Arial"/>
               </a:rPr>
-              <a:t>Textbook p.20 · Example 1.13: add the values, then divide by their count.</a:t>
+              <a:t>Textbook p.22 · Example 1.13: add the values, then divide by their count.</a:t>
             </a:r>
           </a:p>
         </p:txBody>
@@ -42780,7 +42780,7 @@
                 </a:solidFill>
                 <a:latin typeface="Arial"/>
               </a:rPr>
-              <a:t>Textbook  |  page 20</a:t>
+              <a:t>Textbook  |  page 22</a:t>
             </a:r>
           </a:p>
         </p:txBody>
@@ -42828,7 +42828,7 @@
                 </a:solidFill>
                 <a:latin typeface="Arial"/>
               </a:rPr>
-              <a:t>Textbook Chapter 1 pp.15–21</a:t>
+              <a:t>Textbook Chapter 1 pp.17–23</a:t>
             </a:r>
           </a:p>
         </p:txBody>
@@ -42900,7 +42900,7 @@
                 </a:solidFill>
                 <a:latin typeface="Arial"/>
               </a:rPr>
-              <a:t>Textbook p.20 · Example 1.14: calculate need, then round the whole-box order up.</a:t>
+              <a:t>Textbook p.22 · Example 1.14: calculate need, then round the whole-box order up.</a:t>
             </a:r>
           </a:p>
         </p:txBody>

--- a/carpentry/intake-142/PowerPoint/Day-02_2026-10-30_Week-1.pptx
+++ b/carpentry/intake-142/PowerPoint/Day-02_2026-10-30_Week-1.pptx
@@ -18748,6 +18748,104 @@
           </a:p>
         </p:txBody>
       </p:sp>
+      <p:sp>
+        <p:nvSpPr>
+          <p:cNvPr id="22" name="Play quiz W01-L03"/>
+          <p:cNvSpPr txBox="1"/>
+          <p:nvPr/>
+        </p:nvSpPr>
+        <p:spPr>
+          <a:xfrm>
+            <a:off x="6355080" y="6606540"/>
+            <a:ext cx="822960" cy="210312"/>
+          </a:xfrm>
+          <a:prstGeom prst="rect">
+            <a:avLst/>
+          </a:prstGeom>
+          <a:noFill/>
+        </p:spPr>
+        <p:txBody>
+          <a:bodyPr wrap="square" lIns="0" rIns="0" tIns="0" bIns="0" anchor="t">
+            <a:normAutofit fontScale="100000" lnSpcReduction="0"/>
+          </a:bodyPr>
+          <a:lstStyle/>
+          <a:p>
+            <a:pPr>
+              <a:spcBef>
+                <a:spcPts val="0"/>
+              </a:spcBef>
+              <a:spcAft>
+                <a:spcPts val="0"/>
+              </a:spcAft>
+              <a:defRPr sz="1000" b="0">
+                <a:solidFill>
+                  <a:srgbClr val="D0002B"/>
+                </a:solidFill>
+                <a:latin typeface="Arial"/>
+              </a:defRPr>
+            </a:pPr>
+            <a:r>
+              <a:rPr sz="1000">
+                <a:solidFill>
+                  <a:srgbClr val="F7F8FC"/>
+                </a:solidFill>
+                <a:latin typeface="Arial"/>
+                <a:hlinkClick r:id="rId8"/>
+              </a:rPr>
+              <a:t>Play quiz</a:t>
+            </a:r>
+          </a:p>
+        </p:txBody>
+      </p:sp>
+      <p:sp>
+        <p:nvSpPr>
+          <p:cNvPr id="23" name="Quiz PDF W01-L03"/>
+          <p:cNvSpPr txBox="1"/>
+          <p:nvPr/>
+        </p:nvSpPr>
+        <p:spPr>
+          <a:xfrm>
+            <a:off x="7296912" y="6606540"/>
+            <a:ext cx="1005840" cy="210312"/>
+          </a:xfrm>
+          <a:prstGeom prst="rect">
+            <a:avLst/>
+          </a:prstGeom>
+          <a:noFill/>
+        </p:spPr>
+        <p:txBody>
+          <a:bodyPr wrap="square" lIns="0" rIns="0" tIns="0" bIns="0" anchor="t">
+            <a:normAutofit fontScale="100000" lnSpcReduction="0"/>
+          </a:bodyPr>
+          <a:lstStyle/>
+          <a:p>
+            <a:pPr>
+              <a:spcBef>
+                <a:spcPts val="0"/>
+              </a:spcBef>
+              <a:spcAft>
+                <a:spcPts val="0"/>
+              </a:spcAft>
+              <a:defRPr sz="1000" b="0">
+                <a:solidFill>
+                  <a:srgbClr val="D0002B"/>
+                </a:solidFill>
+                <a:latin typeface="Arial"/>
+              </a:defRPr>
+            </a:pPr>
+            <a:r>
+              <a:rPr sz="1000">
+                <a:solidFill>
+                  <a:srgbClr val="F7F8FC"/>
+                </a:solidFill>
+                <a:latin typeface="Arial"/>
+                <a:hlinkClick r:id="rId9"/>
+              </a:rPr>
+              <a:t>Quiz PDF</a:t>
+            </a:r>
+          </a:p>
+        </p:txBody>
+      </p:sp>
     </p:spTree>
   </p:cSld>
   <p:clrMapOvr>
@@ -38353,6 +38451,104 @@
                 <a:latin typeface="Arial"/>
               </a:rPr>
               <a:t>Day 02  •  2026-10-30  •  44</a:t>
+            </a:r>
+          </a:p>
+        </p:txBody>
+      </p:sp>
+      <p:sp>
+        <p:nvSpPr>
+          <p:cNvPr id="22" name="Play quiz W01-L04"/>
+          <p:cNvSpPr txBox="1"/>
+          <p:nvPr/>
+        </p:nvSpPr>
+        <p:spPr>
+          <a:xfrm>
+            <a:off x="6355080" y="6606540"/>
+            <a:ext cx="822960" cy="210312"/>
+          </a:xfrm>
+          <a:prstGeom prst="rect">
+            <a:avLst/>
+          </a:prstGeom>
+          <a:noFill/>
+        </p:spPr>
+        <p:txBody>
+          <a:bodyPr wrap="square" lIns="0" rIns="0" tIns="0" bIns="0" anchor="t">
+            <a:normAutofit fontScale="100000" lnSpcReduction="0"/>
+          </a:bodyPr>
+          <a:lstStyle/>
+          <a:p>
+            <a:pPr>
+              <a:spcBef>
+                <a:spcPts val="0"/>
+              </a:spcBef>
+              <a:spcAft>
+                <a:spcPts val="0"/>
+              </a:spcAft>
+              <a:defRPr sz="1000" b="0">
+                <a:solidFill>
+                  <a:srgbClr val="D0002B"/>
+                </a:solidFill>
+                <a:latin typeface="Arial"/>
+              </a:defRPr>
+            </a:pPr>
+            <a:r>
+              <a:rPr sz="1000">
+                <a:solidFill>
+                  <a:srgbClr val="F7F8FC"/>
+                </a:solidFill>
+                <a:latin typeface="Arial"/>
+                <a:hlinkClick r:id="rId8"/>
+              </a:rPr>
+              <a:t>Play quiz</a:t>
+            </a:r>
+          </a:p>
+        </p:txBody>
+      </p:sp>
+      <p:sp>
+        <p:nvSpPr>
+          <p:cNvPr id="23" name="Quiz PDF W01-L04"/>
+          <p:cNvSpPr txBox="1"/>
+          <p:nvPr/>
+        </p:nvSpPr>
+        <p:spPr>
+          <a:xfrm>
+            <a:off x="7296912" y="6606540"/>
+            <a:ext cx="1005840" cy="210312"/>
+          </a:xfrm>
+          <a:prstGeom prst="rect">
+            <a:avLst/>
+          </a:prstGeom>
+          <a:noFill/>
+        </p:spPr>
+        <p:txBody>
+          <a:bodyPr wrap="square" lIns="0" rIns="0" tIns="0" bIns="0" anchor="t">
+            <a:normAutofit fontScale="100000" lnSpcReduction="0"/>
+          </a:bodyPr>
+          <a:lstStyle/>
+          <a:p>
+            <a:pPr>
+              <a:spcBef>
+                <a:spcPts val="0"/>
+              </a:spcBef>
+              <a:spcAft>
+                <a:spcPts val="0"/>
+              </a:spcAft>
+              <a:defRPr sz="1000" b="0">
+                <a:solidFill>
+                  <a:srgbClr val="D0002B"/>
+                </a:solidFill>
+                <a:latin typeface="Arial"/>
+              </a:defRPr>
+            </a:pPr>
+            <a:r>
+              <a:rPr sz="1000">
+                <a:solidFill>
+                  <a:srgbClr val="F7F8FC"/>
+                </a:solidFill>
+                <a:latin typeface="Arial"/>
+                <a:hlinkClick r:id="rId9"/>
+              </a:rPr>
+              <a:t>Quiz PDF</a:t>
             </a:r>
           </a:p>
         </p:txBody>
